--- a/media/exports/reports/2025-10/overtime.pptx
+++ b/media/exports/reports/2025-10/overtime.pptx
@@ -211,43 +211,43 @@
                 <c:formatCode>0.0"%";[Red](0.0"%")</c:formatCode>
                 <c:ptCount val="13"/>
                 <c:pt idx="0">
-                  <c:v>1.5</c:v>
+                  <c:v>1.6</c:v>
                 </c:pt>
                 <c:pt idx="1">
-                  <c:v>1.3</c:v>
+                  <c:v>2.7</c:v>
                 </c:pt>
                 <c:pt idx="2">
-                  <c:v>1.9</c:v>
+                  <c:v>2.2</c:v>
                 </c:pt>
                 <c:pt idx="3">
-                  <c:v>2.3</c:v>
+                  <c:v>3.0</c:v>
                 </c:pt>
                 <c:pt idx="4">
-                  <c:v>2.8</c:v>
+                  <c:v>4.6</c:v>
                 </c:pt>
                 <c:pt idx="5">
-                  <c:v>2.4</c:v>
+                  <c:v>4.4</c:v>
                 </c:pt>
                 <c:pt idx="6">
                   <c:v>3.6</c:v>
                 </c:pt>
                 <c:pt idx="7">
-                  <c:v>2.6</c:v>
+                  <c:v>3.7</c:v>
                 </c:pt>
                 <c:pt idx="8">
                   <c:v>2.8</c:v>
                 </c:pt>
                 <c:pt idx="9">
-                  <c:v>2.4</c:v>
+                  <c:v>3.3</c:v>
                 </c:pt>
                 <c:pt idx="10">
-                  <c:v>4.6</c:v>
+                  <c:v>3.3</c:v>
                 </c:pt>
                 <c:pt idx="11">
-                  <c:v>3.0</c:v>
+                  <c:v>3.7</c:v>
                 </c:pt>
                 <c:pt idx="12">
-                  <c:v>4.0</c:v>
+                  <c:v>3.9</c:v>
                 </c:pt>
               </c:numCache>
             </c:numRef>
@@ -434,10 +434,10 @@
                   <c:v>Short-staffed</c:v>
                 </c:pt>
                 <c:pt idx="2">
-                  <c:v>After-hours call-out</c:v>
+                  <c:v>Installation ran over</c:v>
                 </c:pt>
                 <c:pt idx="3">
-                  <c:v>Installation ran over</c:v>
+                  <c:v>After-hours call-out</c:v>
                 </c:pt>
               </c:strCache>
             </c:strRef>
@@ -452,13 +452,13 @@
                   <c:v>1.5</c:v>
                 </c:pt>
                 <c:pt idx="1">
-                  <c:v>11.0</c:v>
+                  <c:v>7.0</c:v>
                 </c:pt>
                 <c:pt idx="2">
-                  <c:v>16.0</c:v>
+                  <c:v>13.5</c:v>
                 </c:pt>
                 <c:pt idx="3">
-                  <c:v>17.5</c:v>
+                  <c:v>16.0</c:v>
                 </c:pt>
               </c:numCache>
             </c:numRef>
@@ -522,7 +522,7 @@
       <c:valAx>
         <c:axId val="-2113994440"/>
         <c:scaling>
-          <c:max val="20.125"/>
+          <c:max val="18.4"/>
           <c:min val="0.0"/>
         </c:scaling>
         <c:delete/>
@@ -636,27 +636,19 @@
               </a:solidFill>
             </c:spPr>
           </c:dPt>
-          <c:dPt>
-            <c:idx val="6"/>
-            <c:spPr>
-              <a:solidFill>
-                <a:srgbClr val="0E9F6E"/>
-              </a:solidFill>
-            </c:spPr>
-          </c:dPt>
           <c:cat>
             <c:strRef>
-              <c:f>Sheet1!$A$2:$A$8</c:f>
+              <c:f>Sheet1!$A$2:$A$7</c:f>
               <c:strCache>
-                <c:ptCount val="7"/>
+                <c:ptCount val="6"/>
                 <c:pt idx="0">
-                  <c:v>Technician T5</c:v>
+                  <c:v>Technician T1</c:v>
                 </c:pt>
                 <c:pt idx="1">
-                  <c:v>Technician T7</c:v>
+                  <c:v>Technician T4</c:v>
                 </c:pt>
                 <c:pt idx="2">
-                  <c:v>Technician T1</c:v>
+                  <c:v>Technician T5</c:v>
                 </c:pt>
                 <c:pt idx="3">
                   <c:v>Technician T6</c:v>
@@ -665,9 +657,6 @@
                   <c:v>Technician T3</c:v>
                 </c:pt>
                 <c:pt idx="5">
-                  <c:v>Technician T4</c:v>
-                </c:pt>
-                <c:pt idx="6">
                   <c:v>Technician T2</c:v>
                 </c:pt>
               </c:strCache>
@@ -675,15 +664,15 @@
           </c:cat>
           <c:val>
             <c:numRef>
-              <c:f>Sheet1!$B$2:$B$8</c:f>
+              <c:f>Sheet1!$B$2:$B$7</c:f>
               <c:numCache>
                 <c:formatCode>#,##0;[Red](#,##0)</c:formatCode>
-                <c:ptCount val="7"/>
+                <c:ptCount val="6"/>
                 <c:pt idx="0">
-                  <c:v>4.5</c:v>
+                  <c:v>3.0</c:v>
                 </c:pt>
                 <c:pt idx="1">
-                  <c:v>5.0</c:v>
+                  <c:v>3.5</c:v>
                 </c:pt>
                 <c:pt idx="2">
                   <c:v>5.5</c:v>
@@ -692,13 +681,10 @@
                   <c:v>5.5</c:v>
                 </c:pt>
                 <c:pt idx="4">
-                  <c:v>7.0</c:v>
+                  <c:v>9.5</c:v>
                 </c:pt>
                 <c:pt idx="5">
-                  <c:v>9.0</c:v>
-                </c:pt>
-                <c:pt idx="6">
-                  <c:v>9.5</c:v>
+                  <c:v>11.0</c:v>
                 </c:pt>
               </c:numCache>
             </c:numRef>
@@ -762,7 +748,7 @@
       <c:valAx>
         <c:axId val="-2113994440"/>
         <c:scaling>
-          <c:max val="10.924999999999999"/>
+          <c:max val="12.649999999999999"/>
           <c:min val="0.0"/>
         </c:scaling>
         <c:delete/>
@@ -1259,7 +1245,7 @@
           <a:lstStyle/>
           <a:p>
             <a:r>
-              <a:t>Where is overtime creeping up, and why?. Overtime, October: 4.0%; Overtime hours, October: 46.0 h; October last year: 1.5%. Technicians worked 46.0 h of overtime in October, 4.0% of ordinary hours (target under 5.0%), against 3.0% in September. Over the last year it has gone from 1.5% to 4.0%. Installation ran over is the main reason: 17.5 h, 38.0% of the overtime. Technician T2 carried the most (9.5 h).</a:t>
+              <a:t>Where is overtime creeping up, and why?. Overtime, October: 3.9%; Overtime hours, October: 38.0 h; October last year: 1.6%. Technicians worked 38.0 h of overtime in October, 3.9% of ordinary hours (target under 5.0%), against 3.7% in September. Over the last year it has gone from 1.6% to 3.9%. After-hours call-out is the main reason: 16.0 h, 42.1% of the overtime. Technician T2 carried the most (11.0 h).</a:t>
             </a:r>
           </a:p>
         </p:txBody>
@@ -4814,7 +4800,7 @@
                 </a:solidFill>
                 <a:latin typeface="Roboto"/>
               </a:rPr>
-              <a:t>Data retrieved 2pm, Tue 6 Oct 2026 · Generated 8 Oct 2026, 6:29pm · Sample data · Made with Python (python-pptx)</a:t>
+              <a:t>Data retrieved 2pm, Tue 6 Oct 2026 · Generated 8 Oct 2026, 11:41pm · Sample data · Made with Python (python-pptx)</a:t>
             </a:r>
           </a:p>
         </p:txBody>
@@ -5160,7 +5146,7 @@
                 </a:solidFill>
                 <a:latin typeface="Roboto"/>
               </a:rPr>
-              <a:t>4.0%</a:t>
+              <a:t>3.9%</a:t>
             </a:r>
           </a:p>
         </p:txBody>
@@ -5326,7 +5312,7 @@
                 </a:solidFill>
                 <a:latin typeface="Roboto"/>
               </a:rPr>
-              <a:t>46.0 h</a:t>
+              <a:t>38.0 h</a:t>
             </a:r>
           </a:p>
         </p:txBody>
@@ -5365,7 +5351,7 @@
                 </a:solidFill>
                 <a:latin typeface="Roboto"/>
               </a:rPr>
-              <a:t>September 34.0 h</a:t>
+              <a:t>September 35.5 h</a:t>
             </a:r>
           </a:p>
         </p:txBody>
@@ -5492,7 +5478,7 @@
                 </a:solidFill>
                 <a:latin typeface="Roboto"/>
               </a:rPr>
-              <a:t>1.5%</a:t>
+              <a:t>1.6%</a:t>
             </a:r>
           </a:p>
         </p:txBody>
@@ -5531,7 +5517,7 @@
                 </a:solidFill>
                 <a:latin typeface="Roboto"/>
               </a:rPr>
-              <a:t>17.5 h of overtime</a:t>
+              <a:t>15.5 h of overtime</a:t>
             </a:r>
           </a:p>
         </p:txBody>
@@ -5676,7 +5662,7 @@
                 </a:solidFill>
                 <a:latin typeface="Roboto"/>
               </a:rPr>
-              <a:t>Technicians worked 46.0 h of overtime in October, 4.0% of ordinary hours (target under 5.0%), against 3.0% in September. Over the last year it has gone from 1.5% to 4.0%.</a:t>
+              <a:t>Technicians worked 38.0 h of overtime in October, 3.9% of ordinary hours (target under 5.0%), against 3.7% in September. Over the last year it has gone from 1.6% to 3.9%.</a:t>
             </a:r>
           </a:p>
         </p:txBody>
@@ -5803,7 +5789,7 @@
                 </a:solidFill>
                 <a:latin typeface="Roboto"/>
               </a:rPr>
-              <a:t>Installation ran over is the main reason: 17.5 h, 38.0% of the overtime. Technician T2 carried the most (9.5 h).</a:t>
+              <a:t>After-hours call-out is the main reason: 16.0 h, 42.1% of the overtime. Technician T2 carried the most (11.0 h).</a:t>
             </a:r>
           </a:p>
         </p:txBody>
@@ -5881,7 +5867,7 @@
                 </a:solidFill>
                 <a:latin typeface="Roboto"/>
               </a:rPr>
-              <a:t>Data retrieved 2pm, Tue 6 Oct 2026 · Generated 8 Oct 2026, 6:29pm · Sample data · Made with Python (python-pptx)</a:t>
+              <a:t>Data retrieved 2pm, Tue 6 Oct 2026 · Generated 8 Oct 2026, 11:41pm · Sample data · Made with Python (python-pptx)</a:t>
             </a:r>
           </a:p>
         </p:txBody>
@@ -6196,7 +6182,7 @@
                 </a:solidFill>
                 <a:latin typeface="Roboto"/>
               </a:rPr>
-              <a:t>Data retrieved 2pm, Tue 6 Oct 2026 · Generated 8 Oct 2026, 6:29pm · Sample data · Made with Python (python-pptx)</a:t>
+              <a:t>Data retrieved 2pm, Tue 6 Oct 2026 · Generated 8 Oct 2026, 11:41pm · Sample data · Made with Python (python-pptx)</a:t>
             </a:r>
           </a:p>
         </p:txBody>
@@ -6511,7 +6497,7 @@
                 </a:solidFill>
                 <a:latin typeface="Roboto"/>
               </a:rPr>
-              <a:t>Data retrieved 2pm, Tue 6 Oct 2026 · Generated 8 Oct 2026, 6:29pm · Sample data · Made with Python (python-pptx)</a:t>
+              <a:t>Data retrieved 2pm, Tue 6 Oct 2026 · Generated 8 Oct 2026, 11:41pm · Sample data · Made with Python (python-pptx)</a:t>
             </a:r>
           </a:p>
         </p:txBody>

--- a/media/exports/reports/2025-10/overtime.pptx
+++ b/media/exports/reports/2025-10/overtime.pptx
@@ -1175,7 +1175,7 @@
           <a:lstStyle/>
           <a:p>
             <a:r>
-              <a:t>Where is overtime creeping up, and why?. Sample Electrical &amp; Air Pty Ltd. Period: October 2025. Each technician's paid hours, day by day: ordinary hours and overtime, with the main reason for the overtime.</a:t>
+              <a:t>Where is overtime creeping up, and why?. Sample Electrical &amp; Air Pty Ltd. Period: October 2025. In short: Overtime was 3.9% of ordinary hours in October (target under 5.0%), up from 1.6% a year earlier. Each technician's paid hours, day by day: ordinary hours and overtime, with the main reason for the overtime.</a:t>
             </a:r>
           </a:p>
         </p:txBody>
@@ -4635,7 +4635,7 @@
                 </a:solidFill>
                 <a:latin typeface="Roboto"/>
               </a:rPr>
-              <a:t>Period: October 2025. Each technician's paid hours, day by day: ordinary hours and overtime, with the main reason for the overtime.</a:t>
+              <a:t>Period: October 2025. In short: Overtime was 3.9% of ordinary hours in October (target under 5.0%), up from 1.6% a year earlier. Each technician's paid hours, day by day: ordinary hours and overtime, with the main reason for the overtime.</a:t>
             </a:r>
           </a:p>
         </p:txBody>
@@ -4800,7 +4800,7 @@
                 </a:solidFill>
                 <a:latin typeface="Roboto"/>
               </a:rPr>
-              <a:t>Data retrieved 2pm, Tue 6 Oct 2026 · Generated 8 Oct 2026, 11:41pm · Sample data · Made with Python (python-pptx)</a:t>
+              <a:t>Data retrieved 2pm, Tue 6 Oct 2026 · Generated 10 Oct 2026, 9:55pm · Sample data · Made with Python (python-pptx)</a:t>
             </a:r>
           </a:p>
         </p:txBody>
@@ -5867,7 +5867,7 @@
                 </a:solidFill>
                 <a:latin typeface="Roboto"/>
               </a:rPr>
-              <a:t>Data retrieved 2pm, Tue 6 Oct 2026 · Generated 8 Oct 2026, 11:41pm · Sample data · Made with Python (python-pptx)</a:t>
+              <a:t>Data retrieved 2pm, Tue 6 Oct 2026 · Generated 10 Oct 2026, 9:55pm · Sample data · Made with Python (python-pptx)</a:t>
             </a:r>
           </a:p>
         </p:txBody>
@@ -6182,7 +6182,7 @@
                 </a:solidFill>
                 <a:latin typeface="Roboto"/>
               </a:rPr>
-              <a:t>Data retrieved 2pm, Tue 6 Oct 2026 · Generated 8 Oct 2026, 11:41pm · Sample data · Made with Python (python-pptx)</a:t>
+              <a:t>Data retrieved 2pm, Tue 6 Oct 2026 · Generated 10 Oct 2026, 9:55pm · Sample data · Made with Python (python-pptx)</a:t>
             </a:r>
           </a:p>
         </p:txBody>
@@ -6497,7 +6497,7 @@
                 </a:solidFill>
                 <a:latin typeface="Roboto"/>
               </a:rPr>
-              <a:t>Data retrieved 2pm, Tue 6 Oct 2026 · Generated 8 Oct 2026, 11:41pm · Sample data · Made with Python (python-pptx)</a:t>
+              <a:t>Data retrieved 2pm, Tue 6 Oct 2026 · Generated 10 Oct 2026, 9:55pm · Sample data · Made with Python (python-pptx)</a:t>
             </a:r>
           </a:p>
         </p:txBody>
